--- a/slides.pptx
+++ b/slides.pptx
@@ -24691,7 +24691,7 @@
                 </a:solidFill>
                 <a:latin typeface="Calibri"/>
               </a:rPr>
-              <a:t>0.288s to 0.215s per object</a:t>
+              <a:t>Range 1.28 to 1.39x, so a 33% gain against an 8% spread</a:t>
             </a:r>
           </a:p>
         </p:txBody>
@@ -24769,7 +24769,7 @@
                 </a:solidFill>
                 <a:latin typeface="Calibri"/>
               </a:rPr>
-              <a:t>Range 1.28 to 1.39x, so a 33% gain against an 8% spread</a:t>
+              <a:t>One job: 0.288s to 0.215s per object, which is 1.34x on its own</a:t>
             </a:r>
           </a:p>
         </p:txBody>

--- a/slides.pptx
+++ b/slides.pptx
@@ -3624,7 +3624,7 @@
                 </a:solidFill>
                 <a:latin typeface="Calibri"/>
               </a:rPr>
-              <a:t>864-d, from the prompt</a:t>
+              <a:t>2048-d, from the prompt</a:t>
             </a:r>
           </a:p>
         </p:txBody>
@@ -3922,7 +3922,7 @@
                 </a:solidFill>
                 <a:latin typeface="Calibri"/>
               </a:rPr>
-              <a:t>864 to stage channels</a:t>
+              <a:t>2048 to channels x 32 heads</a:t>
             </a:r>
           </a:p>
         </p:txBody>
@@ -4418,7 +4418,7 @@
                 </a:solidFill>
                 <a:latin typeface="Calibri"/>
               </a:rPr>
-              <a:t>voxtell/model/voxtell_model.py: DECODER_CONFIGS, num_maskformer_stages=5, decoder_layer=4, TRANSFORMER_NUM_LAYERS=6, TRANSFORMER_NUM_HEADS=8.</a:t>
+              <a:t>Dimensions read from the checkpoint, not from constructor defaults, which disagree: project_text_embed is (2048, 2560), pos_embed is 1728 = 12 cubed, and the stage-4 projection is 10240 = 320 x 32 heads.</a:t>
             </a:r>
           </a:p>
         </p:txBody>
@@ -4688,7 +4688,7 @@
                           </a:solidFill>
                           <a:latin typeface="Calibri"/>
                         </a:rPr>
-                        <a:t>864</a:t>
+                        <a:t>2048</a:t>
                       </a:r>
                     </a:p>
                   </a:txBody>
@@ -5450,7 +5450,7 @@
                 </a:solidFill>
                 <a:latin typeface="Calibri"/>
               </a:rPr>
-              <a:t>Cheap next to the 4B text encoder: it runs on one 864-d token</a:t>
+              <a:t>Cheap next to the 4B text encoder: it runs on a single 2048-d query token</a:t>
             </a:r>
           </a:p>
         </p:txBody>
@@ -5485,7 +5485,7 @@
                 </a:solidFill>
                 <a:latin typeface="Calibri"/>
               </a:rPr>
-              <a:t>voxtell/model/transformer.py, TransformerDecoderLayer.</a:t>
+              <a:t>voxtell/model/transformer.py, with every width confirmed against fold_0/checkpoint_final.pth rather than the constructor defaults.</a:t>
             </a:r>
           </a:p>
         </p:txBody>
@@ -39477,7 +39477,7 @@
                 </a:solidFill>
                 <a:latin typeface="Calibri"/>
               </a:rPr>
-              <a:t>864 dimensions</a:t>
+              <a:t>2048 dimensions</a:t>
             </a:r>
           </a:p>
         </p:txBody>
@@ -39643,7 +39643,7 @@
                 </a:solidFill>
                 <a:latin typeface="Consolas"/>
               </a:rPr>
-              <a:t>    nn.Linear(2048, query_dim),   # query_dim = 864</a:t>
+              <a:t>    nn.Linear(2048, query_dim),   # query_dim = 2048</a:t>
             </a:r>
           </a:p>
           <a:p>

--- a/slides.pptx
+++ b/slides.pptx
@@ -10781,7 +10781,7 @@
                           </a:solidFill>
                           <a:latin typeface="Calibri"/>
                         </a:rPr>
-                        <a:t>Handled by AutoZoom instead</a:t>
+                        <a:t>Not stated in the paper</a:t>
                       </a:r>
                     </a:p>
                   </a:txBody>
